--- a/Reporte 200726.pptx
+++ b/Reporte 200726.pptx
@@ -6420,7 +6420,7 @@
                 <a:latin typeface="Montserrat Black"/>
                 <a:sym typeface="Arial"/>
               </a:rPr>
-              <a:t>Elaborado: 17 de julio</a:t>
+              <a:t>Elaborado: 20 de julio</a:t>
             </a:r>
             <a:endParaRPr lang="es-MX" sz="1600" dirty="0">
               <a:solidFill>
@@ -7213,10 +7213,10 @@
       </p:sp>
       <p:pic>
         <p:nvPicPr>
-          <p:cNvPr id="4" name="Imagen 3">
+          <p:cNvPr id="3" name="Imagen 2">
             <a:extLst>
               <a:ext uri="{FF2B5EF4-FFF2-40B4-BE49-F238E27FC236}">
-                <a16:creationId xmlns:a16="http://schemas.microsoft.com/office/drawing/2014/main" id="{51DFAD6D-D872-A233-DB94-2142F03FD9B0}"/>
+                <a16:creationId xmlns:a16="http://schemas.microsoft.com/office/drawing/2014/main" id="{B77A2088-3B51-8761-14D7-40F3F394CEF9}"/>
               </a:ext>
             </a:extLst>
           </p:cNvPr>
@@ -7233,8 +7233,8 @@
         </p:blipFill>
         <p:spPr>
           <a:xfrm>
-            <a:off x="-36512" y="933334"/>
-            <a:ext cx="9144000" cy="3419707"/>
+            <a:off x="0" y="932693"/>
+            <a:ext cx="9144000" cy="3420990"/>
           </a:xfrm>
           <a:prstGeom prst="rect">
             <a:avLst/>
@@ -7327,10 +7327,10 @@
       </p:sp>
       <p:pic>
         <p:nvPicPr>
-          <p:cNvPr id="3" name="Imagen 2">
+          <p:cNvPr id="4" name="Imagen 3">
             <a:extLst>
               <a:ext uri="{FF2B5EF4-FFF2-40B4-BE49-F238E27FC236}">
-                <a16:creationId xmlns:a16="http://schemas.microsoft.com/office/drawing/2014/main" id="{4940E95E-9B86-E02B-DB00-D4AB5CBD701D}"/>
+                <a16:creationId xmlns:a16="http://schemas.microsoft.com/office/drawing/2014/main" id="{A898D487-986E-479E-4719-9E8ECABE5E6E}"/>
               </a:ext>
             </a:extLst>
           </p:cNvPr>
@@ -7347,8 +7347,8 @@
         </p:blipFill>
         <p:spPr>
           <a:xfrm>
-            <a:off x="0" y="1350072"/>
-            <a:ext cx="9144000" cy="2443356"/>
+            <a:off x="0" y="1416857"/>
+            <a:ext cx="9144000" cy="2452661"/>
           </a:xfrm>
           <a:prstGeom prst="rect">
             <a:avLst/>
@@ -7441,10 +7441,10 @@
       </p:sp>
       <p:pic>
         <p:nvPicPr>
-          <p:cNvPr id="2" name="Imagen 1">
+          <p:cNvPr id="3" name="Imagen 2">
             <a:extLst>
               <a:ext uri="{FF2B5EF4-FFF2-40B4-BE49-F238E27FC236}">
-                <a16:creationId xmlns:a16="http://schemas.microsoft.com/office/drawing/2014/main" id="{7424606F-F58B-745A-F979-F08382CB7AC3}"/>
+                <a16:creationId xmlns:a16="http://schemas.microsoft.com/office/drawing/2014/main" id="{36595C1D-9E77-1874-1B5A-E2295302704C}"/>
               </a:ext>
             </a:extLst>
           </p:cNvPr>
@@ -7461,8 +7461,8 @@
         </p:blipFill>
         <p:spPr>
           <a:xfrm>
-            <a:off x="500383" y="609458"/>
-            <a:ext cx="8070210" cy="4067460"/>
+            <a:off x="1106488" y="914940"/>
+            <a:ext cx="6858000" cy="3456495"/>
           </a:xfrm>
           <a:prstGeom prst="rect">
             <a:avLst/>
@@ -7551,10 +7551,10 @@
       </p:sp>
       <p:pic>
         <p:nvPicPr>
-          <p:cNvPr id="4" name="Imagen 3">
+          <p:cNvPr id="3" name="Imagen 2">
             <a:extLst>
               <a:ext uri="{FF2B5EF4-FFF2-40B4-BE49-F238E27FC236}">
-                <a16:creationId xmlns:a16="http://schemas.microsoft.com/office/drawing/2014/main" id="{DDE481DB-7F3D-7010-8515-DD189B8762E3}"/>
+                <a16:creationId xmlns:a16="http://schemas.microsoft.com/office/drawing/2014/main" id="{EFABE988-73EF-0032-8860-3402FDFE146D}"/>
               </a:ext>
             </a:extLst>
           </p:cNvPr>
@@ -7571,8 +7571,8 @@
         </p:blipFill>
         <p:spPr>
           <a:xfrm>
-            <a:off x="543956" y="714106"/>
-            <a:ext cx="7983064" cy="3858163"/>
+            <a:off x="1710930" y="1033238"/>
+            <a:ext cx="5649113" cy="3219899"/>
           </a:xfrm>
           <a:prstGeom prst="rect">
             <a:avLst/>

--- a/Reporte 200726.pptx
+++ b/Reporte 200726.pptx
@@ -6543,10 +6543,10 @@
       </p:sp>
       <p:pic>
         <p:nvPicPr>
-          <p:cNvPr id="5" name="Imagen 4">
+          <p:cNvPr id="4" name="Imagen 3">
             <a:extLst>
               <a:ext uri="{FF2B5EF4-FFF2-40B4-BE49-F238E27FC236}">
-                <a16:creationId xmlns:a16="http://schemas.microsoft.com/office/drawing/2014/main" id="{FC378CD1-D6B2-94AB-4B36-3DECD69B2F48}"/>
+                <a16:creationId xmlns:a16="http://schemas.microsoft.com/office/drawing/2014/main" id="{7C97C17D-6EB3-F972-0A67-84E1E1C9F74E}"/>
               </a:ext>
             </a:extLst>
           </p:cNvPr>
@@ -6563,8 +6563,8 @@
         </p:blipFill>
         <p:spPr>
           <a:xfrm>
-            <a:off x="0" y="897652"/>
-            <a:ext cx="9144000" cy="3491072"/>
+            <a:off x="0" y="882980"/>
+            <a:ext cx="9144000" cy="3520415"/>
           </a:xfrm>
           <a:prstGeom prst="rect">
             <a:avLst/>
@@ -6641,10 +6641,10 @@
       </p:sp>
       <p:pic>
         <p:nvPicPr>
-          <p:cNvPr id="3" name="Imagen 2">
+          <p:cNvPr id="4" name="Imagen 3">
             <a:extLst>
               <a:ext uri="{FF2B5EF4-FFF2-40B4-BE49-F238E27FC236}">
-                <a16:creationId xmlns:a16="http://schemas.microsoft.com/office/drawing/2014/main" id="{DE5B5992-7BBD-1D97-69F7-CB3D4258DDC6}"/>
+                <a16:creationId xmlns:a16="http://schemas.microsoft.com/office/drawing/2014/main" id="{337F075C-57BD-C44E-930F-E8F2DF687965}"/>
               </a:ext>
             </a:extLst>
           </p:cNvPr>
@@ -6661,8 +6661,8 @@
         </p:blipFill>
         <p:spPr>
           <a:xfrm>
-            <a:off x="0" y="1329685"/>
-            <a:ext cx="9144000" cy="2627005"/>
+            <a:off x="0" y="882980"/>
+            <a:ext cx="9144000" cy="3520415"/>
           </a:xfrm>
           <a:prstGeom prst="rect">
             <a:avLst/>
@@ -6745,10 +6745,10 @@
       </p:sp>
       <p:pic>
         <p:nvPicPr>
-          <p:cNvPr id="3" name="Imagen 2">
+          <p:cNvPr id="4" name="Imagen 3">
             <a:extLst>
               <a:ext uri="{FF2B5EF4-FFF2-40B4-BE49-F238E27FC236}">
-                <a16:creationId xmlns:a16="http://schemas.microsoft.com/office/drawing/2014/main" id="{B24FE980-3A90-F6BF-BA4E-E0C452F004BD}"/>
+                <a16:creationId xmlns:a16="http://schemas.microsoft.com/office/drawing/2014/main" id="{2BB79BC4-54EF-F3A6-D5E1-00112E1C7A07}"/>
               </a:ext>
             </a:extLst>
           </p:cNvPr>
@@ -6765,8 +6765,8 @@
         </p:blipFill>
         <p:spPr>
           <a:xfrm>
-            <a:off x="0" y="971827"/>
-            <a:ext cx="9144000" cy="3342722"/>
+            <a:off x="0" y="688056"/>
+            <a:ext cx="9144000" cy="3910263"/>
           </a:xfrm>
           <a:prstGeom prst="rect">
             <a:avLst/>
@@ -6843,10 +6843,10 @@
       </p:sp>
       <p:pic>
         <p:nvPicPr>
-          <p:cNvPr id="5" name="Imagen 4">
+          <p:cNvPr id="4" name="Imagen 3">
             <a:extLst>
               <a:ext uri="{FF2B5EF4-FFF2-40B4-BE49-F238E27FC236}">
-                <a16:creationId xmlns:a16="http://schemas.microsoft.com/office/drawing/2014/main" id="{00B1C334-2BF5-C42F-9B18-B16AED1E9212}"/>
+                <a16:creationId xmlns:a16="http://schemas.microsoft.com/office/drawing/2014/main" id="{4B6CEAE5-CF81-164E-1457-42BCE943C924}"/>
               </a:ext>
             </a:extLst>
           </p:cNvPr>
@@ -6863,8 +6863,8 @@
         </p:blipFill>
         <p:spPr>
           <a:xfrm>
-            <a:off x="0" y="1272854"/>
-            <a:ext cx="9144000" cy="2740667"/>
+            <a:off x="0" y="1289269"/>
+            <a:ext cx="9144000" cy="2707837"/>
           </a:xfrm>
           <a:prstGeom prst="rect">
             <a:avLst/>
@@ -6941,10 +6941,10 @@
       </p:sp>
       <p:pic>
         <p:nvPicPr>
-          <p:cNvPr id="3" name="Imagen 2">
+          <p:cNvPr id="4" name="Imagen 3">
             <a:extLst>
               <a:ext uri="{FF2B5EF4-FFF2-40B4-BE49-F238E27FC236}">
-                <a16:creationId xmlns:a16="http://schemas.microsoft.com/office/drawing/2014/main" id="{6388E8D9-BB36-625F-2676-2D858433BA4D}"/>
+                <a16:creationId xmlns:a16="http://schemas.microsoft.com/office/drawing/2014/main" id="{C937FDF2-5A45-B79D-5793-4497C74F1504}"/>
               </a:ext>
             </a:extLst>
           </p:cNvPr>
@@ -6961,8 +6961,8 @@
         </p:blipFill>
         <p:spPr>
           <a:xfrm>
-            <a:off x="0" y="629031"/>
-            <a:ext cx="9144000" cy="3885437"/>
+            <a:off x="-1" y="698949"/>
+            <a:ext cx="9144000" cy="3888478"/>
           </a:xfrm>
           <a:prstGeom prst="rect">
             <a:avLst/>
@@ -7039,10 +7039,10 @@
       </p:sp>
       <p:pic>
         <p:nvPicPr>
-          <p:cNvPr id="3" name="Imagen 2">
+          <p:cNvPr id="4" name="Imagen 3">
             <a:extLst>
               <a:ext uri="{FF2B5EF4-FFF2-40B4-BE49-F238E27FC236}">
-                <a16:creationId xmlns:a16="http://schemas.microsoft.com/office/drawing/2014/main" id="{4447EA80-5D51-4B28-D796-8D45D21DB340}"/>
+                <a16:creationId xmlns:a16="http://schemas.microsoft.com/office/drawing/2014/main" id="{1FB0E0E4-4901-3B3D-9A45-2C7EF63E0053}"/>
               </a:ext>
             </a:extLst>
           </p:cNvPr>
@@ -7059,8 +7059,8 @@
         </p:blipFill>
         <p:spPr>
           <a:xfrm>
-            <a:off x="0" y="843705"/>
-            <a:ext cx="9144000" cy="3598965"/>
+            <a:off x="1974423" y="433078"/>
+            <a:ext cx="5122130" cy="4710422"/>
           </a:xfrm>
           <a:prstGeom prst="rect">
             <a:avLst/>
